--- a/#presentations/013_kimgaejin_string.pptx
+++ b/#presentations/013_kimgaejin_string.pptx
@@ -7549,7 +7549,7 @@
             </a:pPr>
             <a:r>
               <a:rPr lang="en-US" altLang="ko-KR"/>
-              <a:t>for (int i = 0 ; I &lt; 10000; ++i) str += i;</a:t>
+              <a:t>for (int i = 1 ; I &lt; 10000; ++i) str += i;</a:t>
             </a:r>
           </a:p>
           <a:p>
@@ -7578,7 +7578,7 @@
             </a:pPr>
             <a:r>
               <a:rPr lang="en-US" altLang="ko-KR"/>
-              <a:t>var sb = new StringBuilder(5000);</a:t>
+              <a:t>var sb = new StringBuilder(20);</a:t>
             </a:r>
           </a:p>
           <a:p>
@@ -7587,7 +7587,7 @@
             </a:pPr>
             <a:r>
               <a:rPr lang="en-US" altLang="ko-KR"/>
-              <a:t>for (int I = 0 ; I &lt; 10000; ++i) sb.Append(i);</a:t>
+              <a:t>for (int I = 1 ; I &lt; 10000; ++i) sb.Append(i);</a:t>
             </a:r>
           </a:p>
           <a:p>
@@ -7601,15 +7601,23 @@
             </a:r>
             <a:r>
               <a:rPr lang="en-US" altLang="ko-KR"/>
-              <a:t>“123456789101112…5000” </a:t>
-            </a:r>
-            <a:r>
-              <a:rPr lang="ko-KR" altLang="en-US"/>
-              <a:t>쯤 저장하고 </a:t>
-            </a:r>
-            <a:r>
-              <a:rPr lang="en-US" altLang="ko-KR"/>
-              <a:t>“500150025003…” </a:t>
+              <a:t>“12345678910111213141”(20</a:t>
+            </a:r>
+            <a:r>
+              <a:rPr lang="ko-KR" altLang="en-US"/>
+              <a:t>자</a:t>
+            </a:r>
+            <a:r>
+              <a:rPr lang="en-US" altLang="ko-KR"/>
+              <a:t>) </a:t>
+            </a:r>
+            <a:r>
+              <a:rPr lang="ko-KR" altLang="en-US"/>
+              <a:t>저장하고 </a:t>
+            </a:r>
+            <a:r>
+              <a:rPr lang="en-US" altLang="ko-KR"/>
+              <a:t>“51617181920…” </a:t>
             </a:r>
             <a:r>
               <a:rPr lang="ko-KR" altLang="en-US"/>
@@ -7627,25 +7635,47 @@
             </a:pPr>
             <a:r>
               <a:rPr lang="ko-KR" altLang="en-US"/>
-              <a:t>청크별로 나눠서 저장하며</a:t>
-            </a:r>
-            <a:r>
-              <a:rPr lang="en-US" altLang="ko-KR"/>
-              <a:t>, cpp</a:t>
-            </a:r>
-            <a:r>
-              <a:rPr lang="ko-KR" altLang="en-US"/>
-              <a:t>의 문자열 </a:t>
-            </a:r>
-            <a:r>
-              <a:rPr lang="en-US" altLang="ko-KR"/>
-              <a:t>insert </a:t>
-            </a:r>
-            <a:r>
-              <a:rPr lang="ko-KR" altLang="en-US"/>
-              <a:t>기능처럼 사용이 된다</a:t>
+              <a:t>청크별로 나눠서 저장</a:t>
             </a:r>
             <a:endParaRPr lang="en-US" altLang="ko-KR"/>
+          </a:p>
+          <a:p>
+            <a:pPr>
+              <a:buFontTx/>
+              <a:buChar char="-"/>
+            </a:pPr>
+            <a:r>
+              <a:rPr lang="ko-KR" altLang="en-US"/>
+              <a:t>문자열이 필요할 때</a:t>
+            </a:r>
+            <a:r>
+              <a:rPr lang="en-US" altLang="ko-KR"/>
+              <a:t>, 1</a:t>
+            </a:r>
+            <a:r>
+              <a:rPr lang="ko-KR" altLang="en-US"/>
+              <a:t>회만 힙할당 </a:t>
+            </a:r>
+            <a:r>
+              <a:rPr lang="en-US" altLang="ko-KR"/>
+              <a:t>(</a:t>
+            </a:r>
+            <a:r>
+              <a:rPr lang="ko-KR" altLang="en-US"/>
+              <a:t>모든 청크를 순회해서 하나의 </a:t>
+            </a:r>
+            <a:r>
+              <a:rPr lang="en-US" altLang="ko-KR"/>
+              <a:t>string</a:t>
+            </a:r>
+            <a:r>
+              <a:rPr lang="ko-KR" altLang="en-US"/>
+              <a:t>으로</a:t>
+            </a:r>
+            <a:r>
+              <a:rPr lang="en-US" altLang="ko-KR"/>
+              <a:t>)</a:t>
+            </a:r>
           </a:p>
         </p:txBody>
       </p:sp>
@@ -7818,20 +7848,6 @@
             <a:pPr marL="0" indent="0">
               <a:buNone/>
             </a:pPr>
-            <a:endParaRPr lang="en-US" altLang="ko-KR"/>
-          </a:p>
-          <a:p>
-            <a:pPr marL="0" indent="0">
-              <a:buNone/>
-            </a:pPr>
-            <a:r>
-              <a:rPr lang="en-US" altLang="ko-KR"/>
-              <a:t>TMP </a:t>
-            </a:r>
-            <a:r>
-              <a:rPr lang="ko-KR" altLang="en-US"/>
-              <a:t>에서 문자열 캐싱의 조건은 </a:t>
-            </a:r>
             <a:endParaRPr lang="en-US" altLang="ko-KR"/>
           </a:p>
         </p:txBody>
